--- a/apps/resources/bundled_files/5-klass-ondu-bolchok-orun-maani-sabak.pptx
+++ b/apps/resources/bundled_files/5-klass-ondu-bolchok-orun-maani-sabak.pptx
@@ -5196,7 +5196,7 @@
                 </a:solidFill>
                 <a:latin typeface="PT Sans"/>
               </a:rPr>
-              <a:t>5-класс · Математика</a:t>
+              <a:t/>
             </a:r>
           </a:p>
         </p:txBody>
@@ -5688,7 +5688,7 @@
                 </a:solidFill>
                 <a:latin typeface="PT Sans"/>
               </a:rPr>
-              <a:t>5-класс ›</a:t>
+              <a:t/>
             </a:r>
           </a:p>
           <a:p>
@@ -6637,7 +6637,7 @@
                 </a:solidFill>
                 <a:latin typeface="PT Sans"/>
               </a:rPr>
-              <a:t>5-класс ›</a:t>
+              <a:t/>
             </a:r>
           </a:p>
           <a:p>
@@ -10463,7 +10463,7 @@
                 </a:solidFill>
                 <a:latin typeface="PT Sans"/>
               </a:rPr>
-              <a:t>5-класс ›</a:t>
+              <a:t/>
             </a:r>
           </a:p>
           <a:p>
@@ -14349,7 +14349,7 @@
                 </a:solidFill>
                 <a:latin typeface="PT Sans"/>
               </a:rPr>
-              <a:t>5-класс ›</a:t>
+              <a:t/>
             </a:r>
           </a:p>
           <a:p>
@@ -15932,7 +15932,7 @@
                 </a:solidFill>
                 <a:latin typeface="PT Sans"/>
               </a:rPr>
-              <a:t>5-класс ›</a:t>
+              <a:t/>
             </a:r>
           </a:p>
           <a:p>
@@ -16722,7 +16722,7 @@
                 </a:solidFill>
                 <a:latin typeface="PT Sans"/>
               </a:rPr>
-              <a:t>5-класс ›</a:t>
+              <a:t/>
             </a:r>
           </a:p>
           <a:p>
@@ -17512,7 +17512,7 @@
                 </a:solidFill>
                 <a:latin typeface="PT Sans"/>
               </a:rPr>
-              <a:t>5-класс ›</a:t>
+              <a:t/>
             </a:r>
           </a:p>
           <a:p>
@@ -19139,7 +19139,7 @@
                 </a:solidFill>
                 <a:latin typeface="PT Sans"/>
               </a:rPr>
-              <a:t>5-класс ›</a:t>
+              <a:t/>
             </a:r>
           </a:p>
           <a:p>
@@ -20223,7 +20223,7 @@
                 </a:solidFill>
                 <a:latin typeface="PT Sans"/>
               </a:rPr>
-              <a:t>5-класс ›</a:t>
+              <a:t/>
             </a:r>
           </a:p>
           <a:p>
@@ -21753,7 +21753,7 @@
                 </a:solidFill>
                 <a:latin typeface="PT Sans"/>
               </a:rPr>
-              <a:t>5-класс ›</a:t>
+              <a:t/>
             </a:r>
           </a:p>
           <a:p>
@@ -23257,7 +23257,7 @@
                 </a:solidFill>
                 <a:latin typeface="PT Sans"/>
               </a:rPr>
-              <a:t>5-класс ›</a:t>
+              <a:t/>
             </a:r>
           </a:p>
           <a:p>
@@ -24534,7 +24534,7 @@
                 </a:solidFill>
                 <a:latin typeface="PT Sans"/>
               </a:rPr>
-              <a:t>5-класс ›</a:t>
+              <a:t/>
             </a:r>
           </a:p>
           <a:p>
@@ -25962,7 +25962,7 @@
                 </a:solidFill>
                 <a:latin typeface="PT Sans"/>
               </a:rPr>
-              <a:t>5-класс ›</a:t>
+              <a:t/>
             </a:r>
           </a:p>
           <a:p>
@@ -27418,7 +27418,7 @@
                 </a:solidFill>
                 <a:latin typeface="PT Sans"/>
               </a:rPr>
-              <a:t>5-класс ›</a:t>
+              <a:t/>
             </a:r>
           </a:p>
           <a:p>
@@ -28508,7 +28508,7 @@
                 </a:solidFill>
                 <a:latin typeface="PT Sans"/>
               </a:rPr>
-              <a:t>5-класс ›</a:t>
+              <a:t/>
             </a:r>
           </a:p>
           <a:p>
@@ -29308,7 +29308,7 @@
                 </a:solidFill>
                 <a:latin typeface="PT Sans"/>
               </a:rPr>
-              <a:t>5-класс ›</a:t>
+              <a:t/>
             </a:r>
           </a:p>
           <a:p>
@@ -30149,7 +30149,7 @@
                 </a:solidFill>
                 <a:latin typeface="PT Sans"/>
               </a:rPr>
-              <a:t>5-класс ›</a:t>
+              <a:t/>
             </a:r>
           </a:p>
           <a:p>
@@ -31098,7 +31098,7 @@
                 </a:solidFill>
                 <a:latin typeface="PT Sans"/>
               </a:rPr>
-              <a:t>5-класс ›</a:t>
+              <a:t/>
             </a:r>
           </a:p>
           <a:p>
@@ -32552,7 +32552,7 @@
                 </a:solidFill>
                 <a:latin typeface="PT Sans"/>
               </a:rPr>
-              <a:t>5-класс ›</a:t>
+              <a:t/>
             </a:r>
           </a:p>
           <a:p>
@@ -33298,7 +33298,7 @@
                 </a:solidFill>
                 <a:latin typeface="PT Sans"/>
               </a:rPr>
-              <a:t>5-класс ›</a:t>
+              <a:t/>
             </a:r>
           </a:p>
           <a:p>
@@ -34106,7 +34106,7 @@
                 </a:solidFill>
                 <a:latin typeface="PT Sans"/>
               </a:rPr>
-              <a:t>5-класс ›</a:t>
+              <a:t/>
             </a:r>
           </a:p>
           <a:p>
@@ -35297,7 +35297,7 @@
                 </a:solidFill>
                 <a:latin typeface="PT Sans"/>
               </a:rPr>
-              <a:t>5-класс ›</a:t>
+              <a:t/>
             </a:r>
           </a:p>
           <a:p>
@@ -36476,7 +36476,7 @@
                 </a:solidFill>
                 <a:latin typeface="PT Sans"/>
               </a:rPr>
-              <a:t>5-класс ›</a:t>
+              <a:t/>
             </a:r>
           </a:p>
           <a:p>
@@ -36657,7 +36657,7 @@
                 </a:solidFill>
                 <a:latin typeface="PT Sans"/>
               </a:rPr>
-              <a:t>4-класс</a:t>
+              <a:t/>
             </a:r>
           </a:p>
         </p:txBody>
@@ -36837,7 +36837,7 @@
                 </a:solidFill>
                 <a:latin typeface="PT Sans"/>
               </a:rPr>
-              <a:t>5-класс</a:t>
+              <a:t/>
             </a:r>
           </a:p>
         </p:txBody>
@@ -37073,7 +37073,7 @@
                 </a:solidFill>
                 <a:latin typeface="PT Sans"/>
               </a:rPr>
-              <a:t>5–6-класс</a:t>
+              <a:t/>
             </a:r>
           </a:p>
         </p:txBody>
@@ -37254,7 +37254,7 @@
                 </a:solidFill>
                 <a:latin typeface="PT Sans"/>
               </a:rPr>
-              <a:t>6-класс</a:t>
+              <a:t/>
             </a:r>
           </a:p>
         </p:txBody>
@@ -37674,7 +37674,7 @@
                 </a:solidFill>
                 <a:latin typeface="PT Sans"/>
               </a:rPr>
-              <a:t>5-класс ›</a:t>
+              <a:t/>
             </a:r>
           </a:p>
           <a:p>
@@ -38822,7 +38822,7 @@
                 </a:solidFill>
                 <a:latin typeface="PT Sans"/>
               </a:rPr>
-              <a:t>5-класс ›</a:t>
+              <a:t/>
             </a:r>
           </a:p>
           <a:p>

--- a/apps/resources/bundled_files/5-klass-ondu-bolchok-orun-maani-sabak.pptx
+++ b/apps/resources/bundled_files/5-klass-ondu-bolchok-orun-maani-sabak.pptx
@@ -1582,7 +1582,7 @@
           <a:lstStyle/>
           <a:p>
             <a:r>
-              <a:t>Ой жүгүртүү маданияты (Wenxi Lee, 2.6).</a:t>
+              <a:t>Ой жүгүртүү маданияты (Wenxi Lee, 2,6).</a:t>
             </a:r>
           </a:p>
         </p:txBody>
